--- a/assets/powerpoints/module-n2-inscription/B1-l-annonce-sur-le-babillard.pptx
+++ b/assets/powerpoints/module-n2-inscription/B1-l-annonce-sur-le-babillard.pptx
@@ -10608,13 +10608,184 @@
               </a:lnSpc>
             </a:pPr>
             <a:r>
+              <a:rPr sz="2000" b="1" i="0">
+                <a:solidFill>
+                  <a:srgbClr val="4B4F52"/>
+                </a:solidFill>
+                <a:latin typeface="Verdana"/>
+              </a:rPr>
+              <a:t>À</a:t>
+            </a:r>
+            <a:r>
               <a:rPr sz="2000" b="0" i="0">
                 <a:solidFill>
                   <a:srgbClr val="4B4F52"/>
                 </a:solidFill>
                 <a:latin typeface="Verdana"/>
               </a:rPr>
-              <a:t>&lt;b&gt;À&lt;/b&gt; pour une seule heure : le cours commence &lt;b&gt;à&lt;/b&gt; 8 h 30. &lt;b&gt;De… à&lt;/b&gt; pour une durée : &lt;b&gt;de&lt;/b&gt; 8 h 30 &lt;b&gt;à&lt;/b&gt; 12 h 30. &lt;b&gt;Du… au&lt;/b&gt; pour deux jours ou deux dates : &lt;b&gt;du&lt;/b&gt; lundi &lt;b&gt;au&lt;/b&gt; vendredi, &lt;b&gt;du&lt;/b&gt; 24 &lt;b&gt;au&lt;/b&gt; 28 août.</a:t>
+              <a:t> pour une seule heure : le cours commence </a:t>
+            </a:r>
+            <a:r>
+              <a:rPr sz="2000" b="1" i="0">
+                <a:solidFill>
+                  <a:srgbClr val="4B4F52"/>
+                </a:solidFill>
+                <a:latin typeface="Verdana"/>
+              </a:rPr>
+              <a:t>à</a:t>
+            </a:r>
+            <a:r>
+              <a:rPr sz="2000" b="0" i="0">
+                <a:solidFill>
+                  <a:srgbClr val="4B4F52"/>
+                </a:solidFill>
+                <a:latin typeface="Verdana"/>
+              </a:rPr>
+              <a:t> 8 h 30. </a:t>
+            </a:r>
+            <a:r>
+              <a:rPr sz="2000" b="1" i="0">
+                <a:solidFill>
+                  <a:srgbClr val="4B4F52"/>
+                </a:solidFill>
+                <a:latin typeface="Verdana"/>
+              </a:rPr>
+              <a:t>De… à</a:t>
+            </a:r>
+            <a:r>
+              <a:rPr sz="2000" b="0" i="0">
+                <a:solidFill>
+                  <a:srgbClr val="4B4F52"/>
+                </a:solidFill>
+                <a:latin typeface="Verdana"/>
+              </a:rPr>
+              <a:t> pour une durée : </a:t>
+            </a:r>
+            <a:r>
+              <a:rPr sz="2000" b="1" i="0">
+                <a:solidFill>
+                  <a:srgbClr val="4B4F52"/>
+                </a:solidFill>
+                <a:latin typeface="Verdana"/>
+              </a:rPr>
+              <a:t>de</a:t>
+            </a:r>
+            <a:r>
+              <a:rPr sz="2000" b="0" i="0">
+                <a:solidFill>
+                  <a:srgbClr val="4B4F52"/>
+                </a:solidFill>
+                <a:latin typeface="Verdana"/>
+              </a:rPr>
+              <a:t> 8 h 30 </a:t>
+            </a:r>
+            <a:r>
+              <a:rPr sz="2000" b="1" i="0">
+                <a:solidFill>
+                  <a:srgbClr val="4B4F52"/>
+                </a:solidFill>
+                <a:latin typeface="Verdana"/>
+              </a:rPr>
+              <a:t>à</a:t>
+            </a:r>
+            <a:r>
+              <a:rPr sz="2000" b="0" i="0">
+                <a:solidFill>
+                  <a:srgbClr val="4B4F52"/>
+                </a:solidFill>
+                <a:latin typeface="Verdana"/>
+              </a:rPr>
+              <a:t> 12 h 30. </a:t>
+            </a:r>
+            <a:r>
+              <a:rPr sz="2000" b="1" i="0">
+                <a:solidFill>
+                  <a:srgbClr val="4B4F52"/>
+                </a:solidFill>
+                <a:latin typeface="Verdana"/>
+              </a:rPr>
+              <a:t>Du… au</a:t>
+            </a:r>
+            <a:r>
+              <a:rPr sz="2000" b="0" i="0">
+                <a:solidFill>
+                  <a:srgbClr val="4B4F52"/>
+                </a:solidFill>
+                <a:latin typeface="Verdana"/>
+              </a:rPr>
+              <a:t> pour deux jours ou deux dates : </a:t>
+            </a:r>
+            <a:r>
+              <a:rPr sz="2000" b="1" i="0">
+                <a:solidFill>
+                  <a:srgbClr val="4B4F52"/>
+                </a:solidFill>
+                <a:latin typeface="Verdana"/>
+              </a:rPr>
+              <a:t>du</a:t>
+            </a:r>
+            <a:r>
+              <a:rPr sz="2000" b="0" i="0">
+                <a:solidFill>
+                  <a:srgbClr val="4B4F52"/>
+                </a:solidFill>
+                <a:latin typeface="Verdana"/>
+              </a:rPr>
+              <a:t> lundi </a:t>
+            </a:r>
+            <a:r>
+              <a:rPr sz="2000" b="1" i="0">
+                <a:solidFill>
+                  <a:srgbClr val="4B4F52"/>
+                </a:solidFill>
+                <a:latin typeface="Verdana"/>
+              </a:rPr>
+              <a:t>au</a:t>
+            </a:r>
+            <a:r>
+              <a:rPr sz="2000" b="0" i="0">
+                <a:solidFill>
+                  <a:srgbClr val="4B4F52"/>
+                </a:solidFill>
+                <a:latin typeface="Verdana"/>
+              </a:rPr>
+              <a:t> vendredi, </a:t>
+            </a:r>
+            <a:r>
+              <a:rPr sz="2000" b="1" i="0">
+                <a:solidFill>
+                  <a:srgbClr val="4B4F52"/>
+                </a:solidFill>
+                <a:latin typeface="Verdana"/>
+              </a:rPr>
+              <a:t>du</a:t>
+            </a:r>
+            <a:r>
+              <a:rPr sz="2000" b="0" i="0">
+                <a:solidFill>
+                  <a:srgbClr val="4B4F52"/>
+                </a:solidFill>
+                <a:latin typeface="Verdana"/>
+              </a:rPr>
+              <a:t> 24 </a:t>
+            </a:r>
+            <a:r>
+              <a:rPr sz="2000" b="1" i="0">
+                <a:solidFill>
+                  <a:srgbClr val="4B4F52"/>
+                </a:solidFill>
+                <a:latin typeface="Verdana"/>
+              </a:rPr>
+              <a:t>au</a:t>
+            </a:r>
+            <a:r>
+              <a:rPr sz="2000" b="0" i="0">
+                <a:solidFill>
+                  <a:srgbClr val="4B4F52"/>
+                </a:solidFill>
+                <a:latin typeface="Verdana"/>
+              </a:rPr>
+              <a:t> 28 août.</a:t>
             </a:r>
           </a:p>
         </p:txBody>
